--- a/learning/P01_zephyr_make_project/slides/P005_源码模块接入Zephyr工程_Windows.pptx
+++ b/learning/P01_zephyr_make_project/slides/P005_源码模块接入Zephyr工程_Windows.pptx
@@ -21444,7 +21444,29 @@
                 <a:ea typeface="Microsoft YaHei"/>
                 <a:cs typeface="Microsoft YaHei"/>
               </a:rPr>
-              <a:t>CMSIS：同一工作区的 west 活动项目列表提供目录。</a:t>
+              <a:t>CMSIS：同一工作区的 </a:t>
+            </a:r>
+            <a:r>
+              <a:rPr sz="2025" b="0">
+                <a:solidFill>
+                  <a:srgbClr val="A02B93"/>
+                </a:solidFill>
+                <a:latin typeface="Microsoft YaHei"/>
+                <a:ea typeface="Microsoft YaHei"/>
+                <a:cs typeface="Microsoft YaHei"/>
+              </a:rPr>
+              <a:t>west</a:t>
+            </a:r>
+            <a:r>
+              <a:rPr sz="2025" b="0">
+                <a:solidFill>
+                  <a:srgbClr val="29263B"/>
+                </a:solidFill>
+                <a:latin typeface="Microsoft YaHei"/>
+                <a:ea typeface="Microsoft YaHei"/>
+                <a:cs typeface="Microsoft YaHei"/>
+              </a:rPr>
+              <a:t> 活动项目列表提供目录。</a:t>
             </a:r>
           </a:p>
           <a:p>
@@ -21470,7 +21492,29 @@
                 <a:ea typeface="Microsoft YaHei"/>
                 <a:cs typeface="Microsoft YaHei"/>
               </a:rPr>
-              <a:t>HAL：读者通过 EXTRA_ZEPHYR_MODULES 追加本地模块根。</a:t>
+              <a:t>HAL：读者通过 </a:t>
+            </a:r>
+            <a:r>
+              <a:rPr sz="2025" b="0">
+                <a:solidFill>
+                  <a:srgbClr val="B84E00"/>
+                </a:solidFill>
+                <a:latin typeface="Microsoft YaHei"/>
+                <a:ea typeface="Microsoft YaHei"/>
+                <a:cs typeface="Microsoft YaHei"/>
+              </a:rPr>
+              <a:t>EXTRA_ZEPHYR_MODULES</a:t>
+            </a:r>
+            <a:r>
+              <a:rPr sz="2025" b="0">
+                <a:solidFill>
+                  <a:srgbClr val="29263B"/>
+                </a:solidFill>
+                <a:latin typeface="Microsoft YaHei"/>
+                <a:ea typeface="Microsoft YaHei"/>
+                <a:cs typeface="Microsoft YaHei"/>
+              </a:rPr>
+              <a:t> 追加本地模块根。</a:t>
             </a:r>
           </a:p>
           <a:p>
@@ -21499,7 +21543,29 @@
                 <a:ea typeface="Microsoft YaHei"/>
                 <a:cs typeface="Microsoft YaHei"/>
               </a:rPr>
-              <a:t>这是 Zephyr 原生 CMake 输入，保留已有 west 模块。</a:t>
+              <a:t>这是 Zephyr 原生 CMake 输入，保留已有 </a:t>
+            </a:r>
+            <a:r>
+              <a:rPr sz="2025" b="0">
+                <a:solidFill>
+                  <a:srgbClr val="A02B93"/>
+                </a:solidFill>
+                <a:latin typeface="Microsoft YaHei"/>
+                <a:ea typeface="Microsoft YaHei"/>
+                <a:cs typeface="Microsoft YaHei"/>
+              </a:rPr>
+              <a:t>west</a:t>
+            </a:r>
+            <a:r>
+              <a:rPr sz="2025" b="0">
+                <a:solidFill>
+                  <a:srgbClr val="29263B"/>
+                </a:solidFill>
+                <a:latin typeface="Microsoft YaHei"/>
+                <a:ea typeface="Microsoft YaHei"/>
+                <a:cs typeface="Microsoft YaHei"/>
+              </a:rPr>
+              <a:t> 模块。</a:t>
             </a:r>
           </a:p>
           <a:p>
@@ -21551,7 +21617,29 @@
                 <a:ea typeface="Microsoft YaHei"/>
                 <a:cs typeface="Microsoft YaHei"/>
               </a:rPr>
-              <a:t>传模块根，不传 module.yml 文件名，也不传 DDL 子目录。</a:t>
+              <a:t>传模块根，不传 </a:t>
+            </a:r>
+            <a:r>
+              <a:rPr sz="2025" b="0">
+                <a:solidFill>
+                  <a:srgbClr val="0070C0"/>
+                </a:solidFill>
+                <a:latin typeface="Microsoft YaHei"/>
+                <a:ea typeface="Microsoft YaHei"/>
+                <a:cs typeface="Microsoft YaHei"/>
+              </a:rPr>
+              <a:t>module.yml</a:t>
+            </a:r>
+            <a:r>
+              <a:rPr sz="2025" b="0">
+                <a:solidFill>
+                  <a:srgbClr val="29263B"/>
+                </a:solidFill>
+                <a:latin typeface="Microsoft YaHei"/>
+                <a:ea typeface="Microsoft YaHei"/>
+                <a:cs typeface="Microsoft YaHei"/>
+              </a:rPr>
+              <a:t> 文件名，也不传 DDL 子目录。</a:t>
             </a:r>
           </a:p>
         </p:txBody>
@@ -21935,13 +22023,24 @@
             <a:r>
               <a:rPr sz="2100" b="0">
                 <a:solidFill>
-                  <a:srgbClr val="005968"/>
+                  <a:srgbClr val="B84E00"/>
                 </a:solidFill>
                 <a:latin typeface="Consolas"/>
                 <a:ea typeface="Consolas"/>
                 <a:cs typeface="Consolas"/>
               </a:rPr>
-              <a:t>-DEXTRA_ZEPHYR_MODULES="&lt;HAL 模块根&gt;;&lt;hc32_port 模块根&gt;"</a:t>
+              <a:t>-DEXTRA_ZEPHYR_MODULES</a:t>
+            </a:r>
+            <a:r>
+              <a:rPr sz="2100" b="0">
+                <a:solidFill>
+                  <a:srgbClr val="29263B"/>
+                </a:solidFill>
+                <a:latin typeface="Consolas"/>
+                <a:ea typeface="Consolas"/>
+                <a:cs typeface="Consolas"/>
+              </a:rPr>
+              <a:t>="&lt;HAL 模块根&gt;;&lt;hc32_port 模块根&gt;"</a:t>
             </a:r>
           </a:p>
         </p:txBody>
@@ -22012,7 +22111,95 @@
                 <a:ea typeface="Microsoft YaHei"/>
                 <a:cs typeface="Microsoft YaHei"/>
               </a:rPr>
-              <a:t>该参数属于 P011 的 cmake -S samples/hello_world -B … 命令。</a:t>
+              <a:t>该参数属于 P011 的 </a:t>
+            </a:r>
+            <a:r>
+              <a:rPr sz="2025" b="0">
+                <a:solidFill>
+                  <a:srgbClr val="A02B93"/>
+                </a:solidFill>
+                <a:latin typeface="Microsoft YaHei"/>
+                <a:ea typeface="Microsoft YaHei"/>
+                <a:cs typeface="Microsoft YaHei"/>
+              </a:rPr>
+              <a:t>cmake</a:t>
+            </a:r>
+            <a:r>
+              <a:rPr sz="2025" b="0">
+                <a:solidFill>
+                  <a:srgbClr val="29263B"/>
+                </a:solidFill>
+                <a:latin typeface="Microsoft YaHei"/>
+                <a:ea typeface="Microsoft YaHei"/>
+                <a:cs typeface="Microsoft YaHei"/>
+              </a:rPr>
+              <a:t> </a:t>
+            </a:r>
+            <a:r>
+              <a:rPr sz="2025" b="0">
+                <a:solidFill>
+                  <a:srgbClr val="B84E00"/>
+                </a:solidFill>
+                <a:latin typeface="Microsoft YaHei"/>
+                <a:ea typeface="Microsoft YaHei"/>
+                <a:cs typeface="Microsoft YaHei"/>
+              </a:rPr>
+              <a:t>-S</a:t>
+            </a:r>
+            <a:r>
+              <a:rPr sz="2025" b="0">
+                <a:solidFill>
+                  <a:srgbClr val="29263B"/>
+                </a:solidFill>
+                <a:latin typeface="Microsoft YaHei"/>
+                <a:ea typeface="Microsoft YaHei"/>
+                <a:cs typeface="Microsoft YaHei"/>
+              </a:rPr>
+              <a:t> </a:t>
+            </a:r>
+            <a:r>
+              <a:rPr sz="2025" b="0">
+                <a:solidFill>
+                  <a:srgbClr val="0070C0"/>
+                </a:solidFill>
+                <a:latin typeface="Microsoft YaHei"/>
+                <a:ea typeface="Microsoft YaHei"/>
+                <a:cs typeface="Microsoft YaHei"/>
+              </a:rPr>
+              <a:t>samples/hello_world</a:t>
+            </a:r>
+            <a:r>
+              <a:rPr sz="2025" b="0">
+                <a:solidFill>
+                  <a:srgbClr val="29263B"/>
+                </a:solidFill>
+                <a:latin typeface="Microsoft YaHei"/>
+                <a:ea typeface="Microsoft YaHei"/>
+                <a:cs typeface="Microsoft YaHei"/>
+              </a:rPr>
+              <a:t> </a:t>
+            </a:r>
+            <a:r>
+              <a:rPr sz="2025" b="0">
+                <a:solidFill>
+                  <a:srgbClr val="B84E00"/>
+                </a:solidFill>
+                <a:latin typeface="Microsoft YaHei"/>
+                <a:ea typeface="Microsoft YaHei"/>
+                <a:cs typeface="Microsoft YaHei"/>
+              </a:rPr>
+              <a:t>-B</a:t>
+            </a:r>
+            <a:r>
+              <a:rPr sz="2025" b="0">
+                <a:solidFill>
+                  <a:srgbClr val="29263B"/>
+                </a:solidFill>
+                <a:latin typeface="Microsoft YaHei"/>
+                <a:ea typeface="Microsoft YaHei"/>
+                <a:cs typeface="Microsoft YaHei"/>
+              </a:rPr>
+              <a:t> … 命令。</a:t>
             </a:r>
           </a:p>
           <a:p>
@@ -22038,7 +22225,51 @@
                 <a:ea typeface="Microsoft YaHei"/>
                 <a:cs typeface="Microsoft YaHei"/>
               </a:rPr>
-              <a:t>保存位置是那个 -B 目录的 CMakeCache.txt；只供该构建目录复用。</a:t>
+              <a:t>保存位置是那个 </a:t>
+            </a:r>
+            <a:r>
+              <a:rPr sz="2025" b="0">
+                <a:solidFill>
+                  <a:srgbClr val="B84E00"/>
+                </a:solidFill>
+                <a:latin typeface="Microsoft YaHei"/>
+                <a:ea typeface="Microsoft YaHei"/>
+                <a:cs typeface="Microsoft YaHei"/>
+              </a:rPr>
+              <a:t>-B</a:t>
+            </a:r>
+            <a:r>
+              <a:rPr sz="2025" b="0">
+                <a:solidFill>
+                  <a:srgbClr val="29263B"/>
+                </a:solidFill>
+                <a:latin typeface="Microsoft YaHei"/>
+                <a:ea typeface="Microsoft YaHei"/>
+                <a:cs typeface="Microsoft YaHei"/>
+              </a:rPr>
+              <a:t> 目录的 </a:t>
+            </a:r>
+            <a:r>
+              <a:rPr sz="2025" b="0">
+                <a:solidFill>
+                  <a:srgbClr val="0070C0"/>
+                </a:solidFill>
+                <a:latin typeface="Microsoft YaHei"/>
+                <a:ea typeface="Microsoft YaHei"/>
+                <a:cs typeface="Microsoft YaHei"/>
+              </a:rPr>
+              <a:t>CMakeCache.txt</a:t>
+            </a:r>
+            <a:r>
+              <a:rPr sz="2025" b="0">
+                <a:solidFill>
+                  <a:srgbClr val="29263B"/>
+                </a:solidFill>
+                <a:latin typeface="Microsoft YaHei"/>
+                <a:ea typeface="Microsoft YaHei"/>
+                <a:cs typeface="Microsoft YaHei"/>
+              </a:rPr>
+              <a:t>；只供该构建目录复用。</a:t>
             </a:r>
           </a:p>
           <a:p>
@@ -22064,7 +22295,7 @@
                 <a:ea typeface="Microsoft YaHei"/>
                 <a:cs typeface="Microsoft YaHei"/>
               </a:rPr>
-              <a:t>HAL 在 03 下载，hc32_port 在 P011 创建；前提未齐时先不要配置。</a:t>
+              <a:t>HAL 在 P004 下载，hc32_port 在 P011 创建；前提未齐时先不要配置。</a:t>
             </a:r>
           </a:p>
         </p:txBody>
@@ -22454,7 +22685,51 @@
                 <a:ea typeface="Microsoft YaHei"/>
                 <a:cs typeface="Microsoft YaHei"/>
               </a:rPr>
-              <a:t>应用 CMakeLists.txt 的 find_package(Zephyr) 触发加载。</a:t>
+              <a:t>应用 </a:t>
+            </a:r>
+            <a:r>
+              <a:rPr sz="2025" b="0">
+                <a:solidFill>
+                  <a:srgbClr val="0070C0"/>
+                </a:solidFill>
+                <a:latin typeface="Microsoft YaHei"/>
+                <a:ea typeface="Microsoft YaHei"/>
+                <a:cs typeface="Microsoft YaHei"/>
+              </a:rPr>
+              <a:t>CMakeLists.txt</a:t>
+            </a:r>
+            <a:r>
+              <a:rPr sz="2025" b="0">
+                <a:solidFill>
+                  <a:srgbClr val="29263B"/>
+                </a:solidFill>
+                <a:latin typeface="Microsoft YaHei"/>
+                <a:ea typeface="Microsoft YaHei"/>
+                <a:cs typeface="Microsoft YaHei"/>
+              </a:rPr>
+              <a:t> 的 </a:t>
+            </a:r>
+            <a:r>
+              <a:rPr sz="2025" b="0">
+                <a:solidFill>
+                  <a:srgbClr val="087B3D"/>
+                </a:solidFill>
+                <a:latin typeface="Microsoft YaHei"/>
+                <a:ea typeface="Microsoft YaHei"/>
+                <a:cs typeface="Microsoft YaHei"/>
+              </a:rPr>
+              <a:t>find_package</a:t>
+            </a:r>
+            <a:r>
+              <a:rPr sz="2025" b="0">
+                <a:solidFill>
+                  <a:srgbClr val="29263B"/>
+                </a:solidFill>
+                <a:latin typeface="Microsoft YaHei"/>
+                <a:ea typeface="Microsoft YaHei"/>
+                <a:cs typeface="Microsoft YaHei"/>
+              </a:rPr>
+              <a:t>(Zephyr) 触发加载。</a:t>
             </a:r>
           </a:p>
           <a:p>
@@ -22480,7 +22755,29 @@
                 <a:ea typeface="Microsoft YaHei"/>
                 <a:cs typeface="Microsoft YaHei"/>
               </a:rPr>
-              <a:t>ZephyrConfig → zephyr_default → zephyr_module.cmake。</a:t>
+              <a:t>ZephyrConfig → zephyr_default → </a:t>
+            </a:r>
+            <a:r>
+              <a:rPr sz="2025" b="0">
+                <a:solidFill>
+                  <a:srgbClr val="0070C0"/>
+                </a:solidFill>
+                <a:latin typeface="Microsoft YaHei"/>
+                <a:ea typeface="Microsoft YaHei"/>
+                <a:cs typeface="Microsoft YaHei"/>
+              </a:rPr>
+              <a:t>zephyr_module.cmake</a:t>
+            </a:r>
+            <a:r>
+              <a:rPr sz="2025" b="0">
+                <a:solidFill>
+                  <a:srgbClr val="29263B"/>
+                </a:solidFill>
+                <a:latin typeface="Microsoft YaHei"/>
+                <a:ea typeface="Microsoft YaHei"/>
+                <a:cs typeface="Microsoft YaHei"/>
+              </a:rPr>
+              <a:t>。</a:t>
             </a:r>
           </a:p>
           <a:p>
@@ -22506,7 +22803,29 @@
                 <a:ea typeface="Microsoft YaHei"/>
                 <a:cs typeface="Microsoft YaHei"/>
               </a:rPr>
-              <a:t>最后一个文件读取 EXTRA_ZEPHYR_MODULES 并调用 Python 脚本。</a:t>
+              <a:t>最后一个文件读取 </a:t>
+            </a:r>
+            <a:r>
+              <a:rPr sz="2025" b="0">
+                <a:solidFill>
+                  <a:srgbClr val="B84E00"/>
+                </a:solidFill>
+                <a:latin typeface="Microsoft YaHei"/>
+                <a:ea typeface="Microsoft YaHei"/>
+                <a:cs typeface="Microsoft YaHei"/>
+              </a:rPr>
+              <a:t>EXTRA_ZEPHYR_MODULES</a:t>
+            </a:r>
+            <a:r>
+              <a:rPr sz="2025" b="0">
+                <a:solidFill>
+                  <a:srgbClr val="29263B"/>
+                </a:solidFill>
+                <a:latin typeface="Microsoft YaHei"/>
+                <a:ea typeface="Microsoft YaHei"/>
+                <a:cs typeface="Microsoft YaHei"/>
+              </a:rPr>
+              <a:t> 并调用 Python 脚本。</a:t>
             </a:r>
           </a:p>
         </p:txBody>
@@ -23091,13 +23410,24 @@
             <a:r>
               <a:rPr sz="1875">
                 <a:solidFill>
+                  <a:srgbClr val="A02B93"/>
+                </a:solidFill>
+                <a:latin typeface="Microsoft YaHei"/>
+                <a:ea typeface="Microsoft YaHei"/>
+                <a:cs typeface="Microsoft YaHei"/>
+              </a:rPr>
+              <a:t>west</a:t>
+            </a:r>
+            <a:r>
+              <a:rPr sz="1875">
+                <a:solidFill>
                   <a:srgbClr val="29263B"/>
                 </a:solidFill>
                 <a:latin typeface="Microsoft YaHei"/>
                 <a:ea typeface="Microsoft YaHei"/>
                 <a:cs typeface="Microsoft YaHei"/>
               </a:rPr>
-              <a:t>west 目录</a:t>
+              <a:t> 目录</a:t>
             </a:r>
           </a:p>
           <a:p>
@@ -23438,7 +23768,7 @@
             <a:r>
               <a:rPr sz="2100" b="0">
                 <a:solidFill>
-                  <a:srgbClr val="005968"/>
+                  <a:srgbClr val="646173"/>
                 </a:solidFill>
                 <a:latin typeface="Consolas"/>
                 <a:ea typeface="Consolas"/>
@@ -23464,13 +23794,24 @@
             <a:r>
               <a:rPr sz="2100" b="0">
                 <a:solidFill>
-                  <a:srgbClr val="005968"/>
+                  <a:srgbClr val="B84E00"/>
                 </a:solidFill>
                 <a:latin typeface="Consolas"/>
                 <a:ea typeface="Consolas"/>
                 <a:cs typeface="Consolas"/>
               </a:rPr>
-              <a:t>name: hal_xhsc</a:t>
+              <a:t>name</a:t>
+            </a:r>
+            <a:r>
+              <a:rPr sz="2100" b="0">
+                <a:solidFill>
+                  <a:srgbClr val="29263B"/>
+                </a:solidFill>
+                <a:latin typeface="Consolas"/>
+                <a:ea typeface="Consolas"/>
+                <a:cs typeface="Consolas"/>
+              </a:rPr>
+              <a:t>: hal_xhsc</a:t>
             </a:r>
           </a:p>
           <a:p>
@@ -23490,13 +23831,24 @@
             <a:r>
               <a:rPr sz="2100" b="0">
                 <a:solidFill>
-                  <a:srgbClr val="005968"/>
+                  <a:srgbClr val="B84E00"/>
                 </a:solidFill>
                 <a:latin typeface="Consolas"/>
                 <a:ea typeface="Consolas"/>
                 <a:cs typeface="Consolas"/>
               </a:rPr>
-              <a:t>build:</a:t>
+              <a:t>build</a:t>
+            </a:r>
+            <a:r>
+              <a:rPr sz="2100" b="0">
+                <a:solidFill>
+                  <a:srgbClr val="29263B"/>
+                </a:solidFill>
+                <a:latin typeface="Consolas"/>
+                <a:ea typeface="Consolas"/>
+                <a:cs typeface="Consolas"/>
+              </a:rPr>
+              <a:t>:</a:t>
             </a:r>
           </a:p>
           <a:p>
@@ -23516,13 +23868,35 @@
             <a:r>
               <a:rPr sz="2100" b="0">
                 <a:solidFill>
-                  <a:srgbClr val="005968"/>
+                  <a:srgbClr val="29263B"/>
                 </a:solidFill>
                 <a:latin typeface="Consolas"/>
                 <a:ea typeface="Consolas"/>
                 <a:cs typeface="Consolas"/>
               </a:rPr>
-              <a:t>  cmake: .</a:t>
+              <a:t>  </a:t>
+            </a:r>
+            <a:r>
+              <a:rPr sz="2100" b="0">
+                <a:solidFill>
+                  <a:srgbClr val="B84E00"/>
+                </a:solidFill>
+                <a:latin typeface="Consolas"/>
+                <a:ea typeface="Consolas"/>
+                <a:cs typeface="Consolas"/>
+              </a:rPr>
+              <a:t>cmake</a:t>
+            </a:r>
+            <a:r>
+              <a:rPr sz="2100" b="0">
+                <a:solidFill>
+                  <a:srgbClr val="29263B"/>
+                </a:solidFill>
+                <a:latin typeface="Consolas"/>
+                <a:ea typeface="Consolas"/>
+                <a:cs typeface="Consolas"/>
+              </a:rPr>
+              <a:t>: .</a:t>
             </a:r>
           </a:p>
         </p:txBody>
@@ -23587,13 +23961,46 @@
             <a:r>
               <a:rPr sz="2025" b="0">
                 <a:solidFill>
+                  <a:srgbClr val="0070C0"/>
+                </a:solidFill>
+                <a:latin typeface="Microsoft YaHei"/>
+                <a:ea typeface="Microsoft YaHei"/>
+                <a:cs typeface="Microsoft YaHei"/>
+              </a:rPr>
+              <a:t>zephyr_module.py</a:t>
+            </a:r>
+            <a:r>
+              <a:rPr sz="2025" b="0">
+                <a:solidFill>
                   <a:srgbClr val="29263B"/>
                 </a:solidFill>
                 <a:latin typeface="Microsoft YaHei"/>
                 <a:ea typeface="Microsoft YaHei"/>
                 <a:cs typeface="Microsoft YaHei"/>
               </a:rPr>
-              <a:t>zephyr_module.py 遍历候选根，再读该根的 zephyr/module.yml。</a:t>
+              <a:t> 遍历候选根，再读该根的 </a:t>
+            </a:r>
+            <a:r>
+              <a:rPr sz="2025" b="0">
+                <a:solidFill>
+                  <a:srgbClr val="0070C0"/>
+                </a:solidFill>
+                <a:latin typeface="Microsoft YaHei"/>
+                <a:ea typeface="Microsoft YaHei"/>
+                <a:cs typeface="Microsoft YaHei"/>
+              </a:rPr>
+              <a:t>zephyr/module.yml</a:t>
+            </a:r>
+            <a:r>
+              <a:rPr sz="2025" b="0">
+                <a:solidFill>
+                  <a:srgbClr val="29263B"/>
+                </a:solidFill>
+                <a:latin typeface="Microsoft YaHei"/>
+                <a:ea typeface="Microsoft YaHei"/>
+                <a:cs typeface="Microsoft YaHei"/>
+              </a:rPr>
+              <a:t>。</a:t>
             </a:r>
           </a:p>
           <a:p>
@@ -23613,13 +24020,68 @@
             <a:r>
               <a:rPr sz="2025" b="0">
                 <a:solidFill>
+                  <a:srgbClr val="B84E00"/>
+                </a:solidFill>
+                <a:latin typeface="Microsoft YaHei"/>
+                <a:ea typeface="Microsoft YaHei"/>
+                <a:cs typeface="Microsoft YaHei"/>
+              </a:rPr>
+              <a:t>name</a:t>
+            </a:r>
+            <a:r>
+              <a:rPr sz="2025" b="0">
+                <a:solidFill>
                   <a:srgbClr val="29263B"/>
                 </a:solidFill>
                 <a:latin typeface="Microsoft YaHei"/>
                 <a:ea typeface="Microsoft YaHei"/>
                 <a:cs typeface="Microsoft YaHei"/>
               </a:rPr>
-              <a:t>name 给模块命名；cmake: . 选择 HAL 根的 CMakeLists.txt。</a:t>
+              <a:t> 给模块命名；</a:t>
+            </a:r>
+            <a:r>
+              <a:rPr sz="2025" b="0">
+                <a:solidFill>
+                  <a:srgbClr val="B84E00"/>
+                </a:solidFill>
+                <a:latin typeface="Microsoft YaHei"/>
+                <a:ea typeface="Microsoft YaHei"/>
+                <a:cs typeface="Microsoft YaHei"/>
+              </a:rPr>
+              <a:t>cmake</a:t>
+            </a:r>
+            <a:r>
+              <a:rPr sz="2025" b="0">
+                <a:solidFill>
+                  <a:srgbClr val="29263B"/>
+                </a:solidFill>
+                <a:latin typeface="Microsoft YaHei"/>
+                <a:ea typeface="Microsoft YaHei"/>
+                <a:cs typeface="Microsoft YaHei"/>
+              </a:rPr>
+              <a:t>: . 选择 HAL 根的 </a:t>
+            </a:r>
+            <a:r>
+              <a:rPr sz="2025" b="0">
+                <a:solidFill>
+                  <a:srgbClr val="0070C0"/>
+                </a:solidFill>
+                <a:latin typeface="Microsoft YaHei"/>
+                <a:ea typeface="Microsoft YaHei"/>
+                <a:cs typeface="Microsoft YaHei"/>
+              </a:rPr>
+              <a:t>CMakeLists.txt</a:t>
+            </a:r>
+            <a:r>
+              <a:rPr sz="2025" b="0">
+                <a:solidFill>
+                  <a:srgbClr val="29263B"/>
+                </a:solidFill>
+                <a:latin typeface="Microsoft YaHei"/>
+                <a:ea typeface="Microsoft YaHei"/>
+                <a:cs typeface="Microsoft YaHei"/>
+              </a:rPr>
+              <a:t>。</a:t>
             </a:r>
           </a:p>
           <a:p>
@@ -23645,7 +24107,29 @@
                 <a:ea typeface="Microsoft YaHei"/>
                 <a:cs typeface="Microsoft YaHei"/>
               </a:rPr>
-              <a:t>识别结果写入构建目录 zephyr_modules.txt，包含名字与实际路径。</a:t>
+              <a:t>识别结果写入构建目录 </a:t>
+            </a:r>
+            <a:r>
+              <a:rPr sz="2025" b="0">
+                <a:solidFill>
+                  <a:srgbClr val="0070C0"/>
+                </a:solidFill>
+                <a:latin typeface="Microsoft YaHei"/>
+                <a:ea typeface="Microsoft YaHei"/>
+                <a:cs typeface="Microsoft YaHei"/>
+              </a:rPr>
+              <a:t>zephyr_modules.txt</a:t>
+            </a:r>
+            <a:r>
+              <a:rPr sz="2025" b="0">
+                <a:solidFill>
+                  <a:srgbClr val="29263B"/>
+                </a:solidFill>
+                <a:latin typeface="Microsoft YaHei"/>
+                <a:ea typeface="Microsoft YaHei"/>
+                <a:cs typeface="Microsoft YaHei"/>
+              </a:rPr>
+              <a:t>，包含名字与实际路径。</a:t>
             </a:r>
           </a:p>
         </p:txBody>
@@ -23960,7 +24444,7 @@
             <a:r>
               <a:rPr sz="2100" b="0">
                 <a:solidFill>
-                  <a:srgbClr val="005968"/>
+                  <a:srgbClr val="646173"/>
                 </a:solidFill>
                 <a:latin typeface="Consolas"/>
                 <a:ea typeface="Consolas"/>
@@ -23986,13 +24470,68 @@
             <a:r>
               <a:rPr sz="2100" b="0">
                 <a:solidFill>
-                  <a:srgbClr val="005968"/>
+                  <a:srgbClr val="087B3D"/>
                 </a:solidFill>
                 <a:latin typeface="Consolas"/>
                 <a:ea typeface="Consolas"/>
                 <a:cs typeface="Consolas"/>
               </a:rPr>
-              <a:t>set(ZEPHYR_${MODULE_NAME_UPPER}_MODULE_DIR ${module_path})</a:t>
+              <a:t>set</a:t>
+            </a:r>
+            <a:r>
+              <a:rPr sz="2100" b="0">
+                <a:solidFill>
+                  <a:srgbClr val="29263B"/>
+                </a:solidFill>
+                <a:latin typeface="Consolas"/>
+                <a:ea typeface="Consolas"/>
+                <a:cs typeface="Consolas"/>
+              </a:rPr>
+              <a:t>(</a:t>
+            </a:r>
+            <a:r>
+              <a:rPr sz="2100" b="0">
+                <a:solidFill>
+                  <a:srgbClr val="B84E00"/>
+                </a:solidFill>
+                <a:latin typeface="Consolas"/>
+                <a:ea typeface="Consolas"/>
+                <a:cs typeface="Consolas"/>
+              </a:rPr>
+              <a:t>ZEPHYR_${MODULE_NAME_UPPER}_MODULE_DIR</a:t>
+            </a:r>
+            <a:r>
+              <a:rPr sz="2100" b="0">
+                <a:solidFill>
+                  <a:srgbClr val="29263B"/>
+                </a:solidFill>
+                <a:latin typeface="Consolas"/>
+                <a:ea typeface="Consolas"/>
+                <a:cs typeface="Consolas"/>
+              </a:rPr>
+              <a:t> </a:t>
+            </a:r>
+            <a:r>
+              <a:rPr sz="2100" b="0">
+                <a:solidFill>
+                  <a:srgbClr val="B84E00"/>
+                </a:solidFill>
+                <a:latin typeface="Consolas"/>
+                <a:ea typeface="Consolas"/>
+                <a:cs typeface="Consolas"/>
+              </a:rPr>
+              <a:t>${module_path}</a:t>
+            </a:r>
+            <a:r>
+              <a:rPr sz="2100" b="0">
+                <a:solidFill>
+                  <a:srgbClr val="29263B"/>
+                </a:solidFill>
+                <a:latin typeface="Consolas"/>
+                <a:ea typeface="Consolas"/>
+                <a:cs typeface="Consolas"/>
+              </a:rPr>
+              <a:t>)</a:t>
             </a:r>
           </a:p>
         </p:txBody>
@@ -24057,13 +24596,46 @@
             <a:r>
               <a:rPr sz="2025" b="0">
                 <a:solidFill>
+                  <a:srgbClr val="0070C0"/>
+                </a:solidFill>
+                <a:latin typeface="Microsoft YaHei"/>
+                <a:ea typeface="Microsoft YaHei"/>
+                <a:cs typeface="Microsoft YaHei"/>
+              </a:rPr>
+              <a:t>zephyr_module.cmake</a:t>
+            </a:r>
+            <a:r>
+              <a:rPr sz="2025" b="0">
+                <a:solidFill>
                   <a:srgbClr val="29263B"/>
                 </a:solidFill>
                 <a:latin typeface="Microsoft YaHei"/>
                 <a:ea typeface="Microsoft YaHei"/>
                 <a:cs typeface="Microsoft YaHei"/>
               </a:rPr>
-              <a:t>zephyr_module.cmake 读回 zephyr_modules.txt。</a:t>
+              <a:t> 读回 </a:t>
+            </a:r>
+            <a:r>
+              <a:rPr sz="2025" b="0">
+                <a:solidFill>
+                  <a:srgbClr val="0070C0"/>
+                </a:solidFill>
+                <a:latin typeface="Microsoft YaHei"/>
+                <a:ea typeface="Microsoft YaHei"/>
+                <a:cs typeface="Microsoft YaHei"/>
+              </a:rPr>
+              <a:t>zephyr_modules.txt</a:t>
+            </a:r>
+            <a:r>
+              <a:rPr sz="2025" b="0">
+                <a:solidFill>
+                  <a:srgbClr val="29263B"/>
+                </a:solidFill>
+                <a:latin typeface="Microsoft YaHei"/>
+                <a:ea typeface="Microsoft YaHei"/>
+                <a:cs typeface="Microsoft YaHei"/>
+              </a:rPr>
+              <a:t>。</a:t>
             </a:r>
           </a:p>
           <a:p>
@@ -24089,7 +24661,51 @@
                 <a:ea typeface="Microsoft YaHei"/>
                 <a:cs typeface="Microsoft YaHei"/>
               </a:rPr>
-              <a:t>本条记录的 MODULE_NAME_UPPER=HAL_XHSC，module_path=HAL 根。</a:t>
+              <a:t>本条记录的 </a:t>
+            </a:r>
+            <a:r>
+              <a:rPr sz="2025" b="0">
+                <a:solidFill>
+                  <a:srgbClr val="B84E00"/>
+                </a:solidFill>
+                <a:latin typeface="Microsoft YaHei"/>
+                <a:ea typeface="Microsoft YaHei"/>
+                <a:cs typeface="Microsoft YaHei"/>
+              </a:rPr>
+              <a:t>MODULE_NAME_UPPER</a:t>
+            </a:r>
+            <a:r>
+              <a:rPr sz="2025" b="0">
+                <a:solidFill>
+                  <a:srgbClr val="29263B"/>
+                </a:solidFill>
+                <a:latin typeface="Microsoft YaHei"/>
+                <a:ea typeface="Microsoft YaHei"/>
+                <a:cs typeface="Microsoft YaHei"/>
+              </a:rPr>
+              <a:t>=HAL_XHSC，</a:t>
+            </a:r>
+            <a:r>
+              <a:rPr sz="2025" b="0">
+                <a:solidFill>
+                  <a:srgbClr val="B84E00"/>
+                </a:solidFill>
+                <a:latin typeface="Microsoft YaHei"/>
+                <a:ea typeface="Microsoft YaHei"/>
+                <a:cs typeface="Microsoft YaHei"/>
+              </a:rPr>
+              <a:t>module_path</a:t>
+            </a:r>
+            <a:r>
+              <a:rPr sz="2025" b="0">
+                <a:solidFill>
+                  <a:srgbClr val="29263B"/>
+                </a:solidFill>
+                <a:latin typeface="Microsoft YaHei"/>
+                <a:ea typeface="Microsoft YaHei"/>
+                <a:cs typeface="Microsoft YaHei"/>
+              </a:rPr>
+              <a:t>=HAL 根。</a:t>
             </a:r>
           </a:p>
           <a:p>
@@ -24115,7 +24731,51 @@
                 <a:ea typeface="Microsoft YaHei"/>
                 <a:cs typeface="Microsoft YaHei"/>
               </a:rPr>
-              <a:t>于是得到 ZEPHYR_HAL_XHSC_MODULE_DIR；它不是环境变量，无需 export。</a:t>
+              <a:t>于是得到 </a:t>
+            </a:r>
+            <a:r>
+              <a:rPr sz="2025" b="0">
+                <a:solidFill>
+                  <a:srgbClr val="B84E00"/>
+                </a:solidFill>
+                <a:latin typeface="Microsoft YaHei"/>
+                <a:ea typeface="Microsoft YaHei"/>
+                <a:cs typeface="Microsoft YaHei"/>
+              </a:rPr>
+              <a:t>ZEPHYR_HAL_XHSC_MODULE_DIR</a:t>
+            </a:r>
+            <a:r>
+              <a:rPr sz="2025" b="0">
+                <a:solidFill>
+                  <a:srgbClr val="29263B"/>
+                </a:solidFill>
+                <a:latin typeface="Microsoft YaHei"/>
+                <a:ea typeface="Microsoft YaHei"/>
+                <a:cs typeface="Microsoft YaHei"/>
+              </a:rPr>
+              <a:t>；它不是环境变量，无需 </a:t>
+            </a:r>
+            <a:r>
+              <a:rPr sz="2025" b="0">
+                <a:solidFill>
+                  <a:srgbClr val="A02B93"/>
+                </a:solidFill>
+                <a:latin typeface="Microsoft YaHei"/>
+                <a:ea typeface="Microsoft YaHei"/>
+                <a:cs typeface="Microsoft YaHei"/>
+              </a:rPr>
+              <a:t>export</a:t>
+            </a:r>
+            <a:r>
+              <a:rPr sz="2025" b="0">
+                <a:solidFill>
+                  <a:srgbClr val="29263B"/>
+                </a:solidFill>
+                <a:latin typeface="Microsoft YaHei"/>
+                <a:ea typeface="Microsoft YaHei"/>
+                <a:cs typeface="Microsoft YaHei"/>
+              </a:rPr>
+              <a:t>。</a:t>
             </a:r>
           </a:p>
         </p:txBody>
@@ -24465,7 +25125,29 @@
                 <a:ea typeface="Microsoft YaHei"/>
                 <a:cs typeface="Microsoft YaHei"/>
               </a:rPr>
-              <a:t>Zephyr 顶层也按模块的 CMake 入口执行 add_subdirectory()。</a:t>
+              <a:t>Zephyr 顶层也按模块的 CMake 入口执行 </a:t>
+            </a:r>
+            <a:r>
+              <a:rPr sz="2025" b="0">
+                <a:solidFill>
+                  <a:srgbClr val="087B3D"/>
+                </a:solidFill>
+                <a:latin typeface="Microsoft YaHei"/>
+                <a:ea typeface="Microsoft YaHei"/>
+                <a:cs typeface="Microsoft YaHei"/>
+              </a:rPr>
+              <a:t>add_subdirectory</a:t>
+            </a:r>
+            <a:r>
+              <a:rPr sz="2025" b="0">
+                <a:solidFill>
+                  <a:srgbClr val="29263B"/>
+                </a:solidFill>
+                <a:latin typeface="Microsoft YaHei"/>
+                <a:ea typeface="Microsoft YaHei"/>
+                <a:cs typeface="Microsoft YaHei"/>
+              </a:rPr>
+              <a:t>()。</a:t>
             </a:r>
           </a:p>
           <a:p>
@@ -24890,7 +25572,29 @@
                 <a:ea typeface="Microsoft YaHei"/>
                 <a:cs typeface="Microsoft YaHei"/>
               </a:rPr>
-              <a:t>检查输出同时包含 west 的 cmsis_6 和额外的 hal_xhsc。</a:t>
+              <a:t>检查输出同时包含 </a:t>
+            </a:r>
+            <a:r>
+              <a:rPr sz="2025" b="0">
+                <a:solidFill>
+                  <a:srgbClr val="A02B93"/>
+                </a:solidFill>
+                <a:latin typeface="Microsoft YaHei"/>
+                <a:ea typeface="Microsoft YaHei"/>
+                <a:cs typeface="Microsoft YaHei"/>
+              </a:rPr>
+              <a:t>west</a:t>
+            </a:r>
+            <a:r>
+              <a:rPr sz="2025" b="0">
+                <a:solidFill>
+                  <a:srgbClr val="29263B"/>
+                </a:solidFill>
+                <a:latin typeface="Microsoft YaHei"/>
+                <a:ea typeface="Microsoft YaHei"/>
+                <a:cs typeface="Microsoft YaHei"/>
+              </a:rPr>
+              <a:t> 的 cmsis_6 和额外的 hal_xhsc。</a:t>
             </a:r>
           </a:p>
           <a:p>
@@ -24945,7 +25649,29 @@
                 <a:ea typeface="Microsoft YaHei"/>
                 <a:cs typeface="Microsoft YaHei"/>
               </a:rPr>
-              <a:t>若缺少 HAL，先核对模块根与 zephyr/module.yml。</a:t>
+              <a:t>若缺少 HAL，先核对模块根与 </a:t>
+            </a:r>
+            <a:r>
+              <a:rPr sz="2025" b="0">
+                <a:solidFill>
+                  <a:srgbClr val="0070C0"/>
+                </a:solidFill>
+                <a:latin typeface="Microsoft YaHei"/>
+                <a:ea typeface="Microsoft YaHei"/>
+                <a:cs typeface="Microsoft YaHei"/>
+              </a:rPr>
+              <a:t>zephyr/module.yml</a:t>
+            </a:r>
+            <a:r>
+              <a:rPr sz="2025" b="0">
+                <a:solidFill>
+                  <a:srgbClr val="29263B"/>
+                </a:solidFill>
+                <a:latin typeface="Microsoft YaHei"/>
+                <a:ea typeface="Microsoft YaHei"/>
+                <a:cs typeface="Microsoft YaHei"/>
+              </a:rPr>
+              <a:t>。</a:t>
             </a:r>
           </a:p>
           <a:p>
@@ -25387,7 +26113,29 @@
                 <a:ea typeface="Microsoft YaHei"/>
                 <a:cs typeface="Microsoft YaHei"/>
               </a:rPr>
-              <a:t>P011 配置：CMakeCache 保存输入，zephyr_modules.txt 记录模块。</a:t>
+              <a:t>P011 配置：CMakeCache 保存输入，</a:t>
+            </a:r>
+            <a:r>
+              <a:rPr sz="2025" b="0">
+                <a:solidFill>
+                  <a:srgbClr val="0070C0"/>
+                </a:solidFill>
+                <a:latin typeface="Microsoft YaHei"/>
+                <a:ea typeface="Microsoft YaHei"/>
+                <a:cs typeface="Microsoft YaHei"/>
+              </a:rPr>
+              <a:t>zephyr_modules.txt</a:t>
+            </a:r>
+            <a:r>
+              <a:rPr sz="2025" b="0">
+                <a:solidFill>
+                  <a:srgbClr val="29263B"/>
+                </a:solidFill>
+                <a:latin typeface="Microsoft YaHei"/>
+                <a:ea typeface="Microsoft YaHei"/>
+                <a:cs typeface="Microsoft YaHei"/>
+              </a:rPr>
+              <a:t> 记录模块。</a:t>
             </a:r>
           </a:p>
           <a:p>
@@ -25416,7 +26164,29 @@
                 <a:ea typeface="Microsoft YaHei"/>
                 <a:cs typeface="Microsoft YaHei"/>
               </a:rPr>
-              <a:t>P011 构建：compile_commands.json 中实际包含需要的 DDL。</a:t>
+              <a:t>P011 构建：</a:t>
+            </a:r>
+            <a:r>
+              <a:rPr sz="2025" b="0">
+                <a:solidFill>
+                  <a:srgbClr val="0070C0"/>
+                </a:solidFill>
+                <a:latin typeface="Microsoft YaHei"/>
+                <a:ea typeface="Microsoft YaHei"/>
+                <a:cs typeface="Microsoft YaHei"/>
+              </a:rPr>
+              <a:t>compile_commands.json</a:t>
+            </a:r>
+            <a:r>
+              <a:rPr sz="2025" b="0">
+                <a:solidFill>
+                  <a:srgbClr val="29263B"/>
+                </a:solidFill>
+                <a:latin typeface="Microsoft YaHei"/>
+                <a:ea typeface="Microsoft YaHei"/>
+                <a:cs typeface="Microsoft YaHei"/>
+              </a:rPr>
+              <a:t> 中实际包含需要的 DDL。</a:t>
             </a:r>
           </a:p>
           <a:p>
@@ -25468,7 +26238,7 @@
                 <a:ea typeface="Microsoft YaHei"/>
                 <a:cs typeface="Microsoft YaHei"/>
               </a:rPr>
-              <a:t>回查依赖时按 01 工具 → 02 SDK → 03 下载 → 04 接入定位。</a:t>
+              <a:t>回查依赖时按 P002 工具 → P003 SDK → P004 下载 → P005 接入定位。</a:t>
             </a:r>
           </a:p>
         </p:txBody>
@@ -25650,7 +26420,7 @@
                 <a:ea typeface="Microsoft YaHei"/>
                 <a:cs typeface="Microsoft YaHei"/>
               </a:rPr>
-              <a:t>04 · 工程接收源码模块的路径</a:t>
+              <a:t>P005 · 工程接收源码模块的路径</a:t>
             </a:r>
           </a:p>
         </p:txBody>
@@ -26108,7 +26878,7 @@
             <a:r>
               <a:rPr sz="1875">
                 <a:solidFill>
-                  <a:srgbClr val="29263B"/>
+                  <a:srgbClr val="0070C0"/>
                 </a:solidFill>
                 <a:latin typeface="Microsoft YaHei"/>
                 <a:ea typeface="Microsoft YaHei"/>
@@ -26536,6 +27306,107 @@
               <a:ea typeface="Microsoft YaHei"/>
               <a:cs typeface="Microsoft YaHei"/>
             </a:endParaRPr>
+          </a:p>
+        </p:txBody>
+      </p:sp>
+      <p:sp>
+        <p:nvSpPr>
+          <p:cNvPr id="13" name="Semantic color legend">
+            <a:extLst>
+              <a:ext uri="{FF2B5EF4-FFF2-40B4-BE49-F238E27FC236}">
+                <a16:creationId xmlns:a16="http://schemas.microsoft.com/office/drawing/2014/main" id="{39154CEE-9E0E-4815-8A42-342F49989EDD}"/>
+              </a:ext>
+            </a:extLst>
+          </p:cNvPr>
+          <p:cNvSpPr>
+            <a:spLocks noGrp="1"/>
+          </p:cNvSpPr>
+          <p:nvPr/>
+        </p:nvSpPr>
+        <p:spPr>
+          <a:xfrm>
+            <a:off x="609600" y="5734050"/>
+            <a:ext cx="10972800" cy="342900"/>
+          </a:xfrm>
+          <a:prstGeom prst="rect">
+            <a:avLst/>
+          </a:prstGeom>
+          <a:noFill/>
+          <a:ln w="0">
+            <a:noFill/>
+          </a:ln>
+        </p:spPr>
+        <p:txBody>
+          <a:bodyPr>
+            <a:noAutofit/>
+          </a:bodyPr>
+          <a:lstStyle>
+            <a:defPPr>
+              <a:defRPr sz="1575">
+                <a:solidFill>
+                  <a:srgbClr val="646173"/>
+                </a:solidFill>
+                <a:latin typeface="Microsoft YaHei"/>
+                <a:ea typeface="Microsoft YaHei"/>
+                <a:cs typeface="Microsoft YaHei"/>
+              </a:defRPr>
+            </a:defPPr>
+          </a:lstStyle>
+          <a:p>
+            <a:pPr>
+              <a:defRPr sz="1575">
+                <a:solidFill>
+                  <a:srgbClr val="646173"/>
+                </a:solidFill>
+                <a:latin typeface="Microsoft YaHei"/>
+                <a:ea typeface="Microsoft YaHei"/>
+                <a:cs typeface="Microsoft YaHei"/>
+              </a:defRPr>
+            </a:pPr>
+            <a:r>
+              <a:t>阅读标色： </a:t>
+            </a:r>
+            <a:r>
+              <a:rPr>
+                <a:solidFill>
+                  <a:srgbClr val="B84E00"/>
+                </a:solidFill>
+              </a:rPr>
+              <a:t>变量 / 参数</a:t>
+            </a:r>
+            <a:r>
+              <a:t>     </a:t>
+            </a:r>
+            <a:r>
+              <a:rPr>
+                <a:solidFill>
+                  <a:srgbClr val="0070C0"/>
+                </a:solidFill>
+              </a:rPr>
+              <a:t>文件 / 路径</a:t>
+            </a:r>
+            <a:r>
+              <a:t>     </a:t>
+            </a:r>
+            <a:r>
+              <a:rPr>
+                <a:solidFill>
+                  <a:srgbClr val="087B3D"/>
+                </a:solidFill>
+              </a:rPr>
+              <a:t>接口函数</a:t>
+            </a:r>
+            <a:r>
+              <a:t>     </a:t>
+            </a:r>
+            <a:r>
+              <a:rPr>
+                <a:solidFill>
+                  <a:srgbClr val="A02B93"/>
+                </a:solidFill>
+              </a:rPr>
+              <a:t>终端命令</a:t>
+            </a:r>
           </a:p>
         </p:txBody>
       </p:sp>
@@ -27104,7 +27975,51 @@
                 <a:ea typeface="Microsoft YaHei"/>
                 <a:cs typeface="Microsoft YaHei"/>
               </a:rPr>
-              <a:t>P011 的 SoC 适配 soc.h 包含 hc32f4a0.h。</a:t>
+              <a:t>P011 的 SoC 适配 </a:t>
+            </a:r>
+            <a:r>
+              <a:rPr sz="2100" b="0">
+                <a:solidFill>
+                  <a:srgbClr val="0070C0"/>
+                </a:solidFill>
+                <a:latin typeface="Microsoft YaHei"/>
+                <a:ea typeface="Microsoft YaHei"/>
+                <a:cs typeface="Microsoft YaHei"/>
+              </a:rPr>
+              <a:t>soc.h</a:t>
+            </a:r>
+            <a:r>
+              <a:rPr sz="2100" b="0">
+                <a:solidFill>
+                  <a:srgbClr val="29263B"/>
+                </a:solidFill>
+                <a:latin typeface="Microsoft YaHei"/>
+                <a:ea typeface="Microsoft YaHei"/>
+                <a:cs typeface="Microsoft YaHei"/>
+              </a:rPr>
+              <a:t> 包含 </a:t>
+            </a:r>
+            <a:r>
+              <a:rPr sz="2100" b="0">
+                <a:solidFill>
+                  <a:srgbClr val="0070C0"/>
+                </a:solidFill>
+                <a:latin typeface="Microsoft YaHei"/>
+                <a:ea typeface="Microsoft YaHei"/>
+                <a:cs typeface="Microsoft YaHei"/>
+              </a:rPr>
+              <a:t>hc32f4a0.h</a:t>
+            </a:r>
+            <a:r>
+              <a:rPr sz="2100" b="0">
+                <a:solidFill>
+                  <a:srgbClr val="29263B"/>
+                </a:solidFill>
+                <a:latin typeface="Microsoft YaHei"/>
+                <a:ea typeface="Microsoft YaHei"/>
+                <a:cs typeface="Microsoft YaHei"/>
+              </a:rPr>
+              <a:t>。</a:t>
             </a:r>
           </a:p>
           <a:p>
@@ -27133,7 +28048,29 @@
                 <a:ea typeface="Microsoft YaHei"/>
                 <a:cs typeface="Microsoft YaHei"/>
               </a:rPr>
-              <a:t>厂商设备头再引用 core_cm4.h。</a:t>
+              <a:t>厂商设备头再引用 </a:t>
+            </a:r>
+            <a:r>
+              <a:rPr sz="2100" b="0">
+                <a:solidFill>
+                  <a:srgbClr val="0070C0"/>
+                </a:solidFill>
+                <a:latin typeface="Microsoft YaHei"/>
+                <a:ea typeface="Microsoft YaHei"/>
+                <a:cs typeface="Microsoft YaHei"/>
+              </a:rPr>
+              <a:t>core_cm4.h</a:t>
+            </a:r>
+            <a:r>
+              <a:rPr sz="2100" b="0">
+                <a:solidFill>
+                  <a:srgbClr val="29263B"/>
+                </a:solidFill>
+                <a:latin typeface="Microsoft YaHei"/>
+                <a:ea typeface="Microsoft YaHei"/>
+                <a:cs typeface="Microsoft YaHei"/>
+              </a:rPr>
+              <a:t>。</a:t>
             </a:r>
           </a:p>
           <a:p>
@@ -27188,7 +28125,29 @@
                 <a:ea typeface="Microsoft YaHei"/>
                 <a:cs typeface="Microsoft YaHei"/>
               </a:rPr>
-              <a:t>Zephyr 的 CMSIS 模块规则加入 Core/Include。</a:t>
+              <a:t>Zephyr 的 CMSIS 模块规则加入 </a:t>
+            </a:r>
+            <a:r>
+              <a:rPr sz="2100" b="0">
+                <a:solidFill>
+                  <a:srgbClr val="0070C0"/>
+                </a:solidFill>
+                <a:latin typeface="Microsoft YaHei"/>
+                <a:ea typeface="Microsoft YaHei"/>
+                <a:cs typeface="Microsoft YaHei"/>
+              </a:rPr>
+              <a:t>Core/Include</a:t>
+            </a:r>
+            <a:r>
+              <a:rPr sz="2100" b="0">
+                <a:solidFill>
+                  <a:srgbClr val="29263B"/>
+                </a:solidFill>
+                <a:latin typeface="Microsoft YaHei"/>
+                <a:ea typeface="Microsoft YaHei"/>
+                <a:cs typeface="Microsoft YaHei"/>
+              </a:rPr>
+              <a:t>。</a:t>
             </a:r>
           </a:p>
           <a:p>
@@ -28205,7 +29164,18 @@
                           <a:ea typeface="Microsoft YaHei"/>
                           <a:cs typeface="Microsoft YaHei"/>
                         </a:rPr>
-                        <a:t>官方 west.yml</a:t>
+                        <a:t>官方 </a:t>
+                      </a:r>
+                      <a:r>
+                        <a:rPr sz="1800" b="0">
+                          <a:solidFill>
+                            <a:srgbClr val="0070C0"/>
+                          </a:solidFill>
+                          <a:latin typeface="Microsoft YaHei"/>
+                          <a:ea typeface="Microsoft YaHei"/>
+                          <a:cs typeface="Microsoft YaHei"/>
+                        </a:rPr>
+                        <a:t>west.yml</a:t>
                       </a:r>
                     </a:p>
                   </a:txBody>
@@ -28335,7 +29305,18 @@
                           <a:ea typeface="Microsoft YaHei"/>
                           <a:cs typeface="Microsoft YaHei"/>
                         </a:rPr>
-                        <a:t>已有模块的 zephyr/module.yml</a:t>
+                        <a:t>已有模块的 </a:t>
+                      </a:r>
+                      <a:r>
+                        <a:rPr sz="1800" b="0">
+                          <a:solidFill>
+                            <a:srgbClr val="0070C0"/>
+                          </a:solidFill>
+                          <a:latin typeface="Microsoft YaHei"/>
+                          <a:ea typeface="Microsoft YaHei"/>
+                          <a:cs typeface="Microsoft YaHei"/>
+                        </a:rPr>
+                        <a:t>zephyr/module.yml</a:t>
                       </a:r>
                     </a:p>
                   </a:txBody>
@@ -28364,7 +29345,29 @@
                           <a:ea typeface="Microsoft YaHei"/>
                           <a:cs typeface="Microsoft YaHei"/>
                         </a:rPr>
-                        <a:t>模块仓库自带；west CMSIS 无需手写</a:t>
+                        <a:t>模块仓库自带；</a:t>
+                      </a:r>
+                      <a:r>
+                        <a:rPr sz="1800" b="0">
+                          <a:solidFill>
+                            <a:srgbClr val="A02B93"/>
+                          </a:solidFill>
+                          <a:latin typeface="Microsoft YaHei"/>
+                          <a:ea typeface="Microsoft YaHei"/>
+                          <a:cs typeface="Microsoft YaHei"/>
+                        </a:rPr>
+                        <a:t>west</a:t>
+                      </a:r>
+                      <a:r>
+                        <a:rPr sz="1800" b="0">
+                          <a:solidFill>
+                            <a:srgbClr val="29263B"/>
+                          </a:solidFill>
+                          <a:latin typeface="Microsoft YaHei"/>
+                          <a:ea typeface="Microsoft YaHei"/>
+                          <a:cs typeface="Microsoft YaHei"/>
+                        </a:rPr>
+                        <a:t> CMSIS 无需手写</a:t>
                       </a:r>
                     </a:p>
                   </a:txBody>
@@ -28400,7 +29403,29 @@
                           <a:ea typeface="Microsoft YaHei"/>
                           <a:cs typeface="Microsoft YaHei"/>
                         </a:rPr>
-                        <a:t>没有模块入口时的 module.yml / CMake</a:t>
+                        <a:t>没有模块入口时的 </a:t>
+                      </a:r>
+                      <a:r>
+                        <a:rPr sz="1800" b="0">
+                          <a:solidFill>
+                            <a:srgbClr val="0070C0"/>
+                          </a:solidFill>
+                          <a:latin typeface="Microsoft YaHei"/>
+                          <a:ea typeface="Microsoft YaHei"/>
+                          <a:cs typeface="Microsoft YaHei"/>
+                        </a:rPr>
+                        <a:t>module.yml</a:t>
+                      </a:r>
+                      <a:r>
+                        <a:rPr sz="1800" b="0">
+                          <a:solidFill>
+                            <a:srgbClr val="29263B"/>
+                          </a:solidFill>
+                          <a:latin typeface="Microsoft YaHei"/>
+                          <a:ea typeface="Microsoft YaHei"/>
+                          <a:cs typeface="Microsoft YaHei"/>
+                        </a:rPr>
+                        <a:t> / CMake</a:t>
                       </a:r>
                     </a:p>
                   </a:txBody>
@@ -28908,13 +29933,24 @@
                       <a:r>
                         <a:rPr sz="1800" b="0">
                           <a:solidFill>
+                            <a:srgbClr val="B84E00"/>
+                          </a:solidFill>
+                          <a:latin typeface="Microsoft YaHei"/>
+                          <a:ea typeface="Microsoft YaHei"/>
+                          <a:cs typeface="Microsoft YaHei"/>
+                        </a:rPr>
+                        <a:t>HAS_HC32_DDL</a:t>
+                      </a:r>
+                      <a:r>
+                        <a:rPr sz="1800" b="0">
+                          <a:solidFill>
                             <a:srgbClr val="29263B"/>
                           </a:solidFill>
                           <a:latin typeface="Microsoft YaHei"/>
                           <a:ea typeface="Microsoft YaHei"/>
                           <a:cs typeface="Microsoft YaHei"/>
                         </a:rPr>
-                        <a:t>HAS_HC32_DDL 启用后才进入 hc32_ddl</a:t>
+                        <a:t> 启用后才进入 hc32_ddl</a:t>
                       </a:r>
                     </a:p>
                   </a:txBody>
@@ -28973,13 +30009,46 @@
                       <a:r>
                         <a:rPr sz="1800" b="0">
                           <a:solidFill>
+                            <a:srgbClr val="B84E00"/>
+                          </a:solidFill>
+                          <a:latin typeface="Microsoft YaHei"/>
+                          <a:ea typeface="Microsoft YaHei"/>
+                          <a:cs typeface="Microsoft YaHei"/>
+                        </a:rPr>
+                        <a:t>SOC_HC32F4A0</a:t>
+                      </a:r>
+                      <a:r>
+                        <a:rPr sz="1800" b="0">
+                          <a:solidFill>
                             <a:srgbClr val="29263B"/>
                           </a:solidFill>
                           <a:latin typeface="Microsoft YaHei"/>
                           <a:ea typeface="Microsoft YaHei"/>
                           <a:cs typeface="Microsoft YaHei"/>
                         </a:rPr>
-                        <a:t>SOC_HC32F4A0 与 HC32_LL_USART 等配置选择系列和源文件</a:t>
+                        <a:t> 与 </a:t>
+                      </a:r>
+                      <a:r>
+                        <a:rPr sz="1800" b="0">
+                          <a:solidFill>
+                            <a:srgbClr val="B84E00"/>
+                          </a:solidFill>
+                          <a:latin typeface="Microsoft YaHei"/>
+                          <a:ea typeface="Microsoft YaHei"/>
+                          <a:cs typeface="Microsoft YaHei"/>
+                        </a:rPr>
+                        <a:t>HC32_LL_USART</a:t>
+                      </a:r>
+                      <a:r>
+                        <a:rPr sz="1800" b="0">
+                          <a:solidFill>
+                            <a:srgbClr val="29263B"/>
+                          </a:solidFill>
+                          <a:latin typeface="Microsoft YaHei"/>
+                          <a:ea typeface="Microsoft YaHei"/>
+                          <a:cs typeface="Microsoft YaHei"/>
+                        </a:rPr>
+                        <a:t> 等配置选择系列和源文件</a:t>
                       </a:r>
                     </a:p>
                   </a:txBody>
@@ -29262,7 +30331,7 @@
                 <a:cs typeface="Microsoft YaHei"/>
                 <a:hlinkClick r:id="rId4"/>
               </a:rPr>
-              <a:t>接入与编译：P011 11.6 / 7.7</a:t>
+              <a:t>接入与编译：P011 11.6 / 11.7</a:t>
             </a:r>
           </a:p>
         </p:txBody>
